--- a/physical/Physical Slides.pptx
+++ b/physical/Physical Slides.pptx
@@ -173,14 +173,6 @@
 </p:cmAuthorLst>
 </file>
 
-<file path=ppt/revisionInfo.xml><?xml version="1.0" encoding="utf-8"?>
-<p1510:revInfo xmlns:a="http://schemas.openxmlformats.org/drawingml/2006/main" xmlns:r="http://schemas.openxmlformats.org/officeDocument/2006/relationships" xmlns:p1510="http://schemas.microsoft.com/office/powerpoint/2015/10/main">
-  <p1510:revLst>
-    <p1510:client id="{1B57B787-1504-474A-99AA-DAF31A274099}" v="390" dt="2025-05-24T15:48:43.050"/>
-  </p1510:revLst>
-</p1510:revInfo>
-</file>
-
 <file path=ppt/ink/ink1.xml><?xml version="1.0" encoding="utf-8"?>
 <inkml:ink xmlns:inkml="http://www.w3.org/2003/InkML">
   <inkml:definitions>
@@ -358,7 +350,7 @@
           <a:p>
             <a:fld id="{0E35528A-819C-4AD3-BDC3-2CDCE7BEAF53}" type="datetimeFigureOut">
               <a:rPr lang="en-GB" smtClean="0"/>
-              <a:t>24/05/2025</a:t>
+              <a:t>27/03/2026</a:t>
             </a:fld>
             <a:endParaRPr lang="en-GB"/>
           </a:p>
@@ -1175,7 +1167,7 @@
           <a:p>
             <a:fld id="{CBBB66F6-7471-47DA-8EED-C7BCCA53B015}" type="datetimeFigureOut">
               <a:rPr lang="en-GB" smtClean="0"/>
-              <a:t>24/05/2025</a:t>
+              <a:t>27/03/2026</a:t>
             </a:fld>
             <a:endParaRPr lang="en-GB"/>
           </a:p>
@@ -1391,7 +1383,7 @@
           <a:p>
             <a:fld id="{CBBB66F6-7471-47DA-8EED-C7BCCA53B015}" type="datetimeFigureOut">
               <a:rPr lang="en-GB" smtClean="0"/>
-              <a:t>24/05/2025</a:t>
+              <a:t>27/03/2026</a:t>
             </a:fld>
             <a:endParaRPr lang="en-GB"/>
           </a:p>
@@ -1601,7 +1593,7 @@
           <a:p>
             <a:fld id="{CBBB66F6-7471-47DA-8EED-C7BCCA53B015}" type="datetimeFigureOut">
               <a:rPr lang="en-GB" smtClean="0"/>
-              <a:t>24/05/2025</a:t>
+              <a:t>27/03/2026</a:t>
             </a:fld>
             <a:endParaRPr lang="en-GB"/>
           </a:p>
@@ -1847,7 +1839,7 @@
           <a:p>
             <a:fld id="{CBBB66F6-7471-47DA-8EED-C7BCCA53B015}" type="datetimeFigureOut">
               <a:rPr lang="en-GB" smtClean="0"/>
-              <a:t>24/05/2025</a:t>
+              <a:t>27/03/2026</a:t>
             </a:fld>
             <a:endParaRPr lang="en-GB"/>
           </a:p>
@@ -2139,7 +2131,7 @@
           <a:p>
             <a:fld id="{CBBB66F6-7471-47DA-8EED-C7BCCA53B015}" type="datetimeFigureOut">
               <a:rPr lang="en-GB" smtClean="0"/>
-              <a:t>24/05/2025</a:t>
+              <a:t>27/03/2026</a:t>
             </a:fld>
             <a:endParaRPr lang="en-GB"/>
           </a:p>
@@ -2499,7 +2491,7 @@
           <a:p>
             <a:fld id="{CBBB66F6-7471-47DA-8EED-C7BCCA53B015}" type="datetimeFigureOut">
               <a:rPr lang="en-GB" smtClean="0"/>
-              <a:t>24/05/2025</a:t>
+              <a:t>27/03/2026</a:t>
             </a:fld>
             <a:endParaRPr lang="en-GB"/>
           </a:p>
@@ -3006,7 +2998,7 @@
           <a:p>
             <a:fld id="{CBBB66F6-7471-47DA-8EED-C7BCCA53B015}" type="datetimeFigureOut">
               <a:rPr lang="en-GB" smtClean="0"/>
-              <a:t>24/05/2025</a:t>
+              <a:t>27/03/2026</a:t>
             </a:fld>
             <a:endParaRPr lang="en-GB"/>
           </a:p>
@@ -3164,7 +3156,7 @@
           <a:p>
             <a:fld id="{CBBB66F6-7471-47DA-8EED-C7BCCA53B015}" type="datetimeFigureOut">
               <a:rPr lang="en-GB" smtClean="0"/>
-              <a:t>24/05/2025</a:t>
+              <a:t>27/03/2026</a:t>
             </a:fld>
             <a:endParaRPr lang="en-GB"/>
           </a:p>
@@ -3293,7 +3285,7 @@
           <a:p>
             <a:fld id="{CBBB66F6-7471-47DA-8EED-C7BCCA53B015}" type="datetimeFigureOut">
               <a:rPr lang="en-GB" smtClean="0"/>
-              <a:t>24/05/2025</a:t>
+              <a:t>27/03/2026</a:t>
             </a:fld>
             <a:endParaRPr lang="en-GB"/>
           </a:p>
@@ -3636,7 +3628,7 @@
           <a:p>
             <a:fld id="{CBBB66F6-7471-47DA-8EED-C7BCCA53B015}" type="datetimeFigureOut">
               <a:rPr lang="en-GB" smtClean="0"/>
-              <a:t>24/05/2025</a:t>
+              <a:t>27/03/2026</a:t>
             </a:fld>
             <a:endParaRPr lang="en-GB"/>
           </a:p>
@@ -3925,7 +3917,7 @@
           <a:p>
             <a:fld id="{CBBB66F6-7471-47DA-8EED-C7BCCA53B015}" type="datetimeFigureOut">
               <a:rPr lang="en-GB" smtClean="0"/>
-              <a:t>24/05/2025</a:t>
+              <a:t>27/03/2026</a:t>
             </a:fld>
             <a:endParaRPr lang="en-GB"/>
           </a:p>
@@ -4172,7 +4164,7 @@
           <a:p>
             <a:fld id="{CBBB66F6-7471-47DA-8EED-C7BCCA53B015}" type="datetimeFigureOut">
               <a:rPr lang="en-GB" noProof="0" smtClean="0"/>
-              <a:t>24/05/2025</a:t>
+              <a:t>27/03/2026</a:t>
             </a:fld>
             <a:endParaRPr lang="en-GB" noProof="0" dirty="0"/>
           </a:p>
@@ -5562,7 +5554,15 @@
                   <a:srgbClr val="7030A0"/>
                 </a:solidFill>
               </a:rPr>
-              <a:t>Vertical ↕</a:t>
+              <a:t>Vertical </a:t>
+            </a:r>
+            <a:r>
+              <a:rPr lang="en-GB" sz="3200" b="1" dirty="0">
+                <a:solidFill>
+                  <a:srgbClr val="7030A0"/>
+                </a:solidFill>
+              </a:rPr>
+              <a:t>↕</a:t>
             </a:r>
           </a:p>
         </p:txBody>
@@ -5613,7 +5613,15 @@
                   <a:srgbClr val="7030A0"/>
                 </a:solidFill>
               </a:rPr>
-              <a:t>Horizontal ↔</a:t>
+              <a:t>Horizontal </a:t>
+            </a:r>
+            <a:r>
+              <a:rPr lang="en-GB" sz="3200" b="1" dirty="0">
+                <a:solidFill>
+                  <a:srgbClr val="7030A0"/>
+                </a:solidFill>
+              </a:rPr>
+              <a:t>↔</a:t>
             </a:r>
           </a:p>
         </p:txBody>
@@ -8709,8 +8717,8 @@
           </p:txBody>
         </p:sp>
       </p:grpSp>
-      <mc:AlternateContent xmlns:mc="http://schemas.openxmlformats.org/markup-compatibility/2006">
-        <mc:Choice xmlns:p14="http://schemas.microsoft.com/office/powerpoint/2010/main" Requires="p14">
+      <mc:AlternateContent xmlns:mc="http://schemas.openxmlformats.org/markup-compatibility/2006" xmlns:p14="http://schemas.microsoft.com/office/powerpoint/2010/main">
+        <mc:Choice Requires="p14">
           <p:contentPart p14:bwMode="auto" r:id="rId4">
             <p14:nvContentPartPr>
               <p14:cNvPr id="28" name="Ink 27">
@@ -8729,7 +8737,7 @@
             </p14:xfrm>
           </p:contentPart>
         </mc:Choice>
-        <mc:Fallback>
+        <mc:Fallback xmlns="">
           <p:pic>
             <p:nvPicPr>
               <p:cNvPr id="28" name="Ink 27">
@@ -8760,8 +8768,8 @@
           </p:pic>
         </mc:Fallback>
       </mc:AlternateContent>
-      <mc:AlternateContent xmlns:mc="http://schemas.openxmlformats.org/markup-compatibility/2006">
-        <mc:Choice xmlns:p14="http://schemas.microsoft.com/office/powerpoint/2010/main" Requires="p14">
+      <mc:AlternateContent xmlns:mc="http://schemas.openxmlformats.org/markup-compatibility/2006" xmlns:p14="http://schemas.microsoft.com/office/powerpoint/2010/main">
+        <mc:Choice Requires="p14">
           <p:contentPart p14:bwMode="auto" r:id="rId6">
             <p14:nvContentPartPr>
               <p14:cNvPr id="32" name="Ink 31">
@@ -8780,7 +8788,7 @@
             </p14:xfrm>
           </p:contentPart>
         </mc:Choice>
-        <mc:Fallback>
+        <mc:Fallback xmlns="">
           <p:pic>
             <p:nvPicPr>
               <p:cNvPr id="32" name="Ink 31">
@@ -8811,8 +8819,8 @@
           </p:pic>
         </mc:Fallback>
       </mc:AlternateContent>
-      <mc:AlternateContent xmlns:mc="http://schemas.openxmlformats.org/markup-compatibility/2006">
-        <mc:Choice xmlns:p14="http://schemas.microsoft.com/office/powerpoint/2010/main" Requires="p14">
+      <mc:AlternateContent xmlns:mc="http://schemas.openxmlformats.org/markup-compatibility/2006" xmlns:p14="http://schemas.microsoft.com/office/powerpoint/2010/main">
+        <mc:Choice Requires="p14">
           <p:contentPart p14:bwMode="auto" r:id="rId8">
             <p14:nvContentPartPr>
               <p14:cNvPr id="35" name="Ink 34">
@@ -8831,7 +8839,7 @@
             </p14:xfrm>
           </p:contentPart>
         </mc:Choice>
-        <mc:Fallback>
+        <mc:Fallback xmlns="">
           <p:pic>
             <p:nvPicPr>
               <p:cNvPr id="35" name="Ink 34">
